--- a/assets/New Microsoft PowerPoint Presentation.pptx
+++ b/assets/New Microsoft PowerPoint Presentation.pptx
@@ -104,6 +104,11 @@
       </a:defRPr>
     </a:lvl9pPr>
   </p:defaultTextStyle>
+  <p:extLst>
+    <p:ext uri="{EFAFB233-063F-42B5-8137-9DF3F51BA10A}">
+      <p15:sldGuideLst xmlns:p15="http://schemas.microsoft.com/office/powerpoint/2012/main"/>
+    </p:ext>
+  </p:extLst>
 </p:presentation>
 </file>
 
@@ -2964,47 +2969,9 @@
           <a:chExt cx="0" cy="0"/>
         </a:xfrm>
       </p:grpSpPr>
-      <p:sp>
-        <p:nvSpPr>
-          <p:cNvPr id="2" name="Title 1"/>
-          <p:cNvSpPr>
-            <a:spLocks noGrp="1"/>
-          </p:cNvSpPr>
-          <p:nvPr>
-            <p:ph type="ctrTitle"/>
-          </p:nvPr>
-        </p:nvSpPr>
-        <p:spPr/>
-        <p:txBody>
-          <a:bodyPr/>
-          <a:lstStyle/>
-          <a:p>
-            <a:endParaRPr lang="en-US"/>
-          </a:p>
-        </p:txBody>
-      </p:sp>
-      <p:sp>
-        <p:nvSpPr>
-          <p:cNvPr id="3" name="Subtitle 2"/>
-          <p:cNvSpPr>
-            <a:spLocks noGrp="1"/>
-          </p:cNvSpPr>
-          <p:nvPr>
-            <p:ph type="subTitle" idx="1"/>
-          </p:nvPr>
-        </p:nvSpPr>
-        <p:spPr/>
-        <p:txBody>
-          <a:bodyPr/>
-          <a:lstStyle/>
-          <a:p>
-            <a:endParaRPr lang="en-US"/>
-          </a:p>
-        </p:txBody>
-      </p:sp>
       <p:pic>
         <p:nvPicPr>
-          <p:cNvPr id="4" name="Picture 3"/>
+          <p:cNvPr id="13" name="Picture 12"/>
           <p:cNvPicPr>
             <a:picLocks noChangeAspect="1"/>
           </p:cNvPicPr>
@@ -3024,8 +2991,8 @@
         </p:blipFill>
         <p:spPr>
           <a:xfrm>
-            <a:off x="-475673" y="-310898"/>
-            <a:ext cx="6571673" cy="3696566"/>
+            <a:off x="-46379" y="0"/>
+            <a:ext cx="8107785" cy="4913093"/>
           </a:xfrm>
           <a:prstGeom prst="rect">
             <a:avLst/>
@@ -3040,14 +3007,14 @@
       </p:pic>
       <p:pic>
         <p:nvPicPr>
-          <p:cNvPr id="5" name="Picture 4"/>
+          <p:cNvPr id="11" name="Picture 10"/>
           <p:cNvPicPr>
             <a:picLocks noChangeAspect="1"/>
           </p:cNvPicPr>
           <p:nvPr/>
         </p:nvPicPr>
         <p:blipFill>
-          <a:blip r:embed="rId3">
+          <a:blip r:embed="rId3" cstate="print">
             <a:extLst>
               <a:ext uri="{28A0092B-C50C-407E-A947-70E740481C1C}">
                 <a14:useLocalDpi xmlns:a14="http://schemas.microsoft.com/office/drawing/2010/main" val="0"/>
@@ -3060,8 +3027,8 @@
         </p:blipFill>
         <p:spPr>
           <a:xfrm>
-            <a:off x="5296450" y="3087472"/>
-            <a:ext cx="6890327" cy="3858583"/>
+            <a:off x="6402919" y="-96200"/>
+            <a:ext cx="6232426" cy="3702511"/>
           </a:xfrm>
           <a:prstGeom prst="rect">
             <a:avLst/>
@@ -3076,49 +3043,42 @@
       </p:pic>
       <p:pic>
         <p:nvPicPr>
-          <p:cNvPr id="6" name="Picture 5"/>
+          <p:cNvPr id="12" name="Picture 11"/>
           <p:cNvPicPr>
             <a:picLocks noChangeAspect="1"/>
           </p:cNvPicPr>
           <p:nvPr/>
         </p:nvPicPr>
-        <p:blipFill>
-          <a:blip r:embed="rId4" cstate="print">
+        <p:blipFill rotWithShape="1">
+          <a:blip r:embed="rId4">
             <a:extLst>
               <a:ext uri="{28A0092B-C50C-407E-A947-70E740481C1C}">
                 <a14:useLocalDpi xmlns:a14="http://schemas.microsoft.com/office/drawing/2010/main" val="0"/>
               </a:ext>
             </a:extLst>
           </a:blip>
-          <a:stretch>
-            <a:fillRect/>
-          </a:stretch>
+          <a:srcRect t="66738"/>
+          <a:stretch/>
         </p:blipFill>
         <p:spPr>
           <a:xfrm>
-            <a:off x="-649753" y="3447349"/>
-            <a:ext cx="6219922" cy="3498706"/>
+            <a:off x="2201748" y="5357553"/>
+            <a:ext cx="8595360" cy="1500447"/>
           </a:xfrm>
           <a:prstGeom prst="rect">
             <a:avLst/>
           </a:prstGeom>
-          <a:ln>
-            <a:noFill/>
-          </a:ln>
-          <a:effectLst>
-            <a:softEdge rad="112500"/>
-          </a:effectLst>
         </p:spPr>
       </p:pic>
       <p:pic>
         <p:nvPicPr>
-          <p:cNvPr id="7" name="Picture 6"/>
+          <p:cNvPr id="8" name="Picture 7"/>
           <p:cNvPicPr>
             <a:picLocks noChangeAspect="1"/>
           </p:cNvPicPr>
           <p:nvPr/>
         </p:nvPicPr>
-        <p:blipFill>
+        <p:blipFill rotWithShape="1">
           <a:blip r:embed="rId5">
             <a:extLst>
               <a:ext uri="{28A0092B-C50C-407E-A947-70E740481C1C}">
@@ -3126,86 +3086,13 @@
               </a:ext>
             </a:extLst>
           </a:blip>
-          <a:stretch>
-            <a:fillRect/>
-          </a:stretch>
+          <a:srcRect t="4930" b="14351"/>
+          <a:stretch/>
         </p:blipFill>
         <p:spPr>
           <a:xfrm>
-            <a:off x="6233647" y="-170653"/>
-            <a:ext cx="6143978" cy="3455988"/>
-          </a:xfrm>
-          <a:prstGeom prst="rect">
-            <a:avLst/>
-          </a:prstGeom>
-          <a:ln>
-            <a:noFill/>
-          </a:ln>
-          <a:effectLst>
-            <a:softEdge rad="112500"/>
-          </a:effectLst>
-        </p:spPr>
-      </p:pic>
-      <p:pic>
-        <p:nvPicPr>
-          <p:cNvPr id="9" name="Picture 8"/>
-          <p:cNvPicPr>
-            <a:picLocks noChangeAspect="1"/>
-          </p:cNvPicPr>
-          <p:nvPr/>
-        </p:nvPicPr>
-        <p:blipFill>
-          <a:blip r:embed="rId6" cstate="print">
-            <a:extLst>
-              <a:ext uri="{28A0092B-C50C-407E-A947-70E740481C1C}">
-                <a14:useLocalDpi xmlns:a14="http://schemas.microsoft.com/office/drawing/2010/main" val="0"/>
-              </a:ext>
-            </a:extLst>
-          </a:blip>
-          <a:stretch>
-            <a:fillRect/>
-          </a:stretch>
-        </p:blipFill>
-        <p:spPr>
-          <a:xfrm>
-            <a:off x="3042777" y="3163557"/>
-            <a:ext cx="3335483" cy="1876209"/>
-          </a:xfrm>
-          <a:prstGeom prst="rect">
-            <a:avLst/>
-          </a:prstGeom>
-          <a:ln>
-            <a:noFill/>
-          </a:ln>
-          <a:effectLst>
-            <a:softEdge rad="112500"/>
-          </a:effectLst>
-        </p:spPr>
-      </p:pic>
-      <p:pic>
-        <p:nvPicPr>
-          <p:cNvPr id="10" name="Picture 9"/>
-          <p:cNvPicPr>
-            <a:picLocks noChangeAspect="1"/>
-          </p:cNvPicPr>
-          <p:nvPr/>
-        </p:nvPicPr>
-        <p:blipFill>
-          <a:blip r:embed="rId7" cstate="print">
-            <a:extLst>
-              <a:ext uri="{28A0092B-C50C-407E-A947-70E740481C1C}">
-                <a14:useLocalDpi xmlns:a14="http://schemas.microsoft.com/office/drawing/2010/main" val="0"/>
-              </a:ext>
-            </a:extLst>
-          </a:blip>
-          <a:stretch>
-            <a:fillRect/>
-          </a:stretch>
-        </p:blipFill>
-        <p:spPr>
-          <a:xfrm>
-            <a:off x="4858327" y="1864690"/>
-            <a:ext cx="3253783" cy="1888719"/>
+            <a:off x="3252152" y="2484582"/>
+            <a:ext cx="6301534" cy="2927927"/>
           </a:xfrm>
           <a:prstGeom prst="rect">
             <a:avLst/>
